--- a/student_files/exercises/Unit_07_GreenHydrogenProduction/Unit07_GreenHydrogenProduction.pptx
+++ b/student_files/exercises/Unit_07_GreenHydrogenProduction/Unit07_GreenHydrogenProduction.pptx
@@ -744,7 +744,7 @@
           <a:p>
             <a:fld id="{ADE9E86A-6679-4EC8-847C-9F954F45BF68}" type="datetimeFigureOut">
               <a:rPr lang="de-DE" smtClean="0"/>
-              <a:t>21.11.2022</a:t>
+              <a:t>26.03.2025</a:t>
             </a:fld>
             <a:endParaRPr lang="de-DE"/>
           </a:p>
@@ -921,7 +921,7 @@
           <a:p>
             <a:fld id="{E313C419-10E8-4216-A6CC-B7C8A23909AD}" type="datetimeFigureOut">
               <a:rPr lang="de-DE" smtClean="0"/>
-              <a:t>21.11.2022</a:t>
+              <a:t>26.03.2025</a:t>
             </a:fld>
             <a:endParaRPr lang="de-DE"/>
           </a:p>
@@ -3448,25 +3448,7 @@
                 </a:solidFill>
                 <a:cs typeface="Arial" panose="020B0604020202020204" pitchFamily="34" charset="0"/>
               </a:rPr>
-              <a:t>Nov. – </a:t>
-            </a:r>
-            <a:r>
-              <a:rPr lang="de-DE" cap="none" dirty="0" err="1">
-                <a:solidFill>
-                  <a:prstClr val="white"/>
-                </a:solidFill>
-                <a:cs typeface="Arial" panose="020B0604020202020204" pitchFamily="34" charset="0"/>
-              </a:rPr>
-              <a:t>Dec</a:t>
-            </a:r>
-            <a:r>
-              <a:rPr lang="de-DE" cap="none" dirty="0">
-                <a:solidFill>
-                  <a:prstClr val="white"/>
-                </a:solidFill>
-                <a:cs typeface="Arial" panose="020B0604020202020204" pitchFamily="34" charset="0"/>
-              </a:rPr>
-              <a:t>. 2022</a:t>
+              <a:t>March 2025</a:t>
             </a:r>
           </a:p>
           <a:p>
@@ -3634,36 +3616,24 @@
           </a:bodyPr>
           <a:lstStyle/>
           <a:p>
-            <a:pPr marL="0" indent="0">
-              <a:buNone/>
-            </a:pPr>
             <a:r>
               <a:rPr lang="en-US" dirty="0"/>
               <a:t>Analyze the existing example of an energy system model in a group of 2-3 people. </a:t>
             </a:r>
           </a:p>
           <a:p>
-            <a:pPr marL="0" indent="0">
-              <a:buNone/>
-            </a:pPr>
             <a:r>
               <a:rPr lang="en-US" dirty="0"/>
               <a:t>Please draw a scheme of the considered energy system containing all components and their connection.</a:t>
             </a:r>
           </a:p>
           <a:p>
-            <a:pPr marL="0" indent="0">
-              <a:buNone/>
-            </a:pPr>
             <a:r>
               <a:rPr lang="en-US" dirty="0"/>
               <a:t>How is the efficiency of the electrolysis included in the model?  Which efficiency is applied in the original model? </a:t>
             </a:r>
           </a:p>
           <a:p>
-            <a:pPr marL="0" indent="0">
-              <a:buNone/>
-            </a:pPr>
             <a:r>
               <a:rPr lang="en-US" dirty="0"/>
               <a:t>Please apply the efficiency of PEM electrolysis mentioned in the related lecture. Compare and explain  the results of both energy system models. The result section of the </a:t>
@@ -3678,25 +3648,17 @@
             </a:r>
             <a:r>
               <a:rPr lang="en-US" b="1" dirty="0"/>
-              <a:t>(30 minutes)</a:t>
-            </a:r>
-          </a:p>
-          <a:p>
-            <a:pPr marL="0" indent="0">
-              <a:buNone/>
-            </a:pPr>
+              <a:t>(30 minutes) </a:t>
+            </a:r>
             <a:r>
               <a:rPr lang="en-US" dirty="0"/>
               <a:t>Discuss your results in class. </a:t>
             </a:r>
           </a:p>
           <a:p>
-            <a:pPr marL="0" indent="0">
-              <a:buNone/>
-            </a:pPr>
             <a:r>
               <a:rPr lang="en-US" dirty="0"/>
-              <a:t>Please explain, why the energy system does not apply all possible components.  </a:t>
+              <a:t>What other components could be added to the energy system in order to improve costs of hydrogen production?  </a:t>
             </a:r>
             <a:r>
               <a:rPr lang="en-US" b="1" dirty="0"/>
@@ -4197,50 +4159,41 @@
         </p:spPr>
         <p:txBody>
           <a:bodyPr>
-            <a:normAutofit fontScale="92500" lnSpcReduction="20000"/>
+            <a:normAutofit fontScale="92500" lnSpcReduction="10000"/>
           </a:bodyPr>
           <a:lstStyle/>
+          <a:p>
+            <a:r>
+              <a:rPr lang="en-US" dirty="0"/>
+              <a:t>Analyze the existing example of an energy system model described in the </a:t>
+            </a:r>
+            <a:r>
+              <a:rPr lang="en-US" dirty="0" err="1"/>
+              <a:t>Jupyter</a:t>
+            </a:r>
+            <a:r>
+              <a:rPr lang="en-US" dirty="0"/>
+              <a:t> Notebook (group of 2-3 people). </a:t>
+            </a:r>
+          </a:p>
+          <a:p>
+            <a:r>
+              <a:rPr lang="en-US" dirty="0"/>
+              <a:t>Please investigate the lecture slides. Which necessary input parameter for PEM electrolysis is not considered yet in the model?</a:t>
+            </a:r>
+          </a:p>
+          <a:p>
+            <a:r>
+              <a:rPr lang="en-US" dirty="0"/>
+              <a:t>Can you imagine reasons for taking this parameter into account in your analysis? Are there any reasons why you should neglect this parameter? </a:t>
+            </a:r>
+          </a:p>
           <a:p>
             <a:pPr marL="0" indent="0">
               <a:buNone/>
             </a:pPr>
             <a:r>
               <a:rPr lang="en-US" dirty="0"/>
-              <a:t>Analyze the existing example of an energy system model described in the </a:t>
-            </a:r>
-            <a:r>
-              <a:rPr lang="en-US" dirty="0" err="1"/>
-              <a:t>Jupyter</a:t>
-            </a:r>
-            <a:r>
-              <a:rPr lang="en-US" dirty="0"/>
-              <a:t> Notebook (group of 2-3 people). </a:t>
-            </a:r>
-          </a:p>
-          <a:p>
-            <a:pPr marL="0" indent="0">
-              <a:buNone/>
-            </a:pPr>
-            <a:r>
-              <a:rPr lang="en-US" dirty="0"/>
-              <a:t>Please investigate the lecture slides. Which necessary input parameter for PEM electrolysis is not considered yet in the model?</a:t>
-            </a:r>
-          </a:p>
-          <a:p>
-            <a:pPr marL="0" indent="0">
-              <a:buNone/>
-            </a:pPr>
-            <a:r>
-              <a:rPr lang="en-US" dirty="0"/>
-              <a:t>Can you imagine reasons for taking this parameter into account in your analysis? Are there any reasons why you should neglect this parameter? </a:t>
-            </a:r>
-          </a:p>
-          <a:p>
-            <a:pPr marL="0" indent="0">
-              <a:buNone/>
-            </a:pPr>
-            <a:r>
-              <a:rPr lang="en-US" dirty="0"/>
               <a:t>Include the parameter in the model by:</a:t>
             </a:r>
           </a:p>
@@ -4253,13 +4206,10 @@
           <a:p>
             <a:r>
               <a:rPr lang="en-US" dirty="0"/>
-              <a:t>Add the input in the conversion by applying the input requirements from the lecture and please plot the eligibility of the additional input parameter.</a:t>
-            </a:r>
-          </a:p>
-          <a:p>
-            <a:pPr marL="0" indent="0">
-              <a:buNone/>
-            </a:pPr>
+              <a:t>Add the input in the conversion by applying the input requirements from the lecture</a:t>
+            </a:r>
+          </a:p>
+          <a:p>
             <a:r>
               <a:rPr lang="en-US" dirty="0"/>
               <a:t>Why is the model always feasible? Is this a realistic approach?</a:t>
@@ -5308,6 +5258,21 @@
 </file>
 
 <file path=customXml/item1.xml><?xml version="1.0" encoding="utf-8"?>
+<?mso-contentType ?>
+<FormTemplates xmlns="http://schemas.microsoft.com/sharepoint/v3/contenttype/forms">
+  <Display>DocumentLibraryForm</Display>
+  <Edit>DocumentLibraryForm</Edit>
+  <New>DocumentLibraryForm</New>
+</FormTemplates>
+</file>
+
+<file path=customXml/item2.xml><?xml version="1.0" encoding="utf-8"?>
+<p:properties xmlns:p="http://schemas.microsoft.com/office/2006/metadata/properties" xmlns:xsi="http://www.w3.org/2001/XMLSchema-instance" xmlns:pc="http://schemas.microsoft.com/office/infopath/2007/PartnerControls">
+  <documentManagement/>
+</p:properties>
+</file>
+
+<file path=customXml/item3.xml><?xml version="1.0" encoding="utf-8"?>
 <ct:contentTypeSchema xmlns:ct="http://schemas.microsoft.com/office/2006/metadata/contentType" xmlns:ma="http://schemas.microsoft.com/office/2006/metadata/properties/metaAttributes" ct:_="" ma:_="" ma:contentTypeName="Dokument" ma:contentTypeID="0x010100D180314A710F7A4EB1047E73480405AC" ma:contentTypeVersion="2" ma:contentTypeDescription="Ein neues Dokument erstellen." ma:contentTypeScope="" ma:versionID="5fce66a760adaa0c3bc41a29ccc7320c">
   <xsd:schema xmlns:xsd="http://www.w3.org/2001/XMLSchema" xmlns:xs="http://www.w3.org/2001/XMLSchema" xmlns:p="http://schemas.microsoft.com/office/2006/metadata/properties" xmlns:ns2="d7b0c8ab-ab56-4bff-bbcf-7cef73c6fd20" targetNamespace="http://schemas.microsoft.com/office/2006/metadata/properties" ma:root="true" ma:fieldsID="6ba31731252026cfbdc8e38cee30aacc" ns2:_="">
     <xsd:import namespace="d7b0c8ab-ab56-4bff-bbcf-7cef73c6fd20"/>
@@ -5439,22 +5404,24 @@
 </ct:contentTypeSchema>
 </file>
 
-<file path=customXml/item2.xml><?xml version="1.0" encoding="utf-8"?>
-<p:properties xmlns:p="http://schemas.microsoft.com/office/2006/metadata/properties" xmlns:xsi="http://www.w3.org/2001/XMLSchema-instance" xmlns:pc="http://schemas.microsoft.com/office/infopath/2007/PartnerControls">
-  <documentManagement/>
-</p:properties>
+<file path=customXml/itemProps1.xml><?xml version="1.0" encoding="utf-8"?>
+<ds:datastoreItem xmlns:ds="http://schemas.openxmlformats.org/officeDocument/2006/customXml" ds:itemID="{91A508FC-C280-40AD-8398-BAA377701E66}">
+  <ds:schemaRefs>
+    <ds:schemaRef ds:uri="http://schemas.microsoft.com/sharepoint/v3/contenttype/forms"/>
+  </ds:schemaRefs>
+</ds:datastoreItem>
 </file>
 
-<file path=customXml/item3.xml><?xml version="1.0" encoding="utf-8"?>
-<?mso-contentType ?>
-<FormTemplates xmlns="http://schemas.microsoft.com/sharepoint/v3/contenttype/forms">
-  <Display>DocumentLibraryForm</Display>
-  <Edit>DocumentLibraryForm</Edit>
-  <New>DocumentLibraryForm</New>
-</FormTemplates>
+<file path=customXml/itemProps2.xml><?xml version="1.0" encoding="utf-8"?>
+<ds:datastoreItem xmlns:ds="http://schemas.openxmlformats.org/officeDocument/2006/customXml" ds:itemID="{BEBFB196-69DD-47B3-A2FC-0C63F3CA58CB}">
+  <ds:schemaRefs>
+    <ds:schemaRef ds:uri="http://schemas.microsoft.com/office/2006/metadata/properties"/>
+    <ds:schemaRef ds:uri="http://schemas.microsoft.com/office/infopath/2007/PartnerControls"/>
+  </ds:schemaRefs>
+</ds:datastoreItem>
 </file>
 
-<file path=customXml/itemProps1.xml><?xml version="1.0" encoding="utf-8"?>
+<file path=customXml/itemProps3.xml><?xml version="1.0" encoding="utf-8"?>
 <ds:datastoreItem xmlns:ds="http://schemas.openxmlformats.org/officeDocument/2006/customXml" ds:itemID="{9DD8BCB8-3A48-4D84-8E08-2A3E06938E31}">
   <ds:schemaRefs>
     <ds:schemaRef ds:uri="d7b0c8ab-ab56-4bff-bbcf-7cef73c6fd20"/>
@@ -5470,21 +5437,4 @@
     <ds:schemaRef ds:uri="http://www.w3.org/2001/XMLSchema"/>
   </ds:schemaRefs>
 </ds:datastoreItem>
-</file>
-
-<file path=customXml/itemProps2.xml><?xml version="1.0" encoding="utf-8"?>
-<ds:datastoreItem xmlns:ds="http://schemas.openxmlformats.org/officeDocument/2006/customXml" ds:itemID="{BEBFB196-69DD-47B3-A2FC-0C63F3CA58CB}">
-  <ds:schemaRefs>
-    <ds:schemaRef ds:uri="http://schemas.microsoft.com/office/2006/metadata/properties"/>
-    <ds:schemaRef ds:uri="http://schemas.microsoft.com/office/infopath/2007/PartnerControls"/>
-  </ds:schemaRefs>
-</ds:datastoreItem>
-</file>
-
-<file path=customXml/itemProps3.xml><?xml version="1.0" encoding="utf-8"?>
-<ds:datastoreItem xmlns:ds="http://schemas.openxmlformats.org/officeDocument/2006/customXml" ds:itemID="{91A508FC-C280-40AD-8398-BAA377701E66}">
-  <ds:schemaRefs>
-    <ds:schemaRef ds:uri="http://schemas.microsoft.com/sharepoint/v3/contenttype/forms"/>
-  </ds:schemaRefs>
-</ds:datastoreItem>
 </file>